--- a/docs/pptx/auc3/ritu-auc3-linsubhr-ratio-hosp6.pptx
+++ b/docs/pptx/auc3/ritu-auc3-linsubhr-ratio-hosp6.pptx
@@ -2443,7 +2443,7 @@
           </p:nvSpPr>
           <p:spPr>
             <a:xfrm>
-              <a:off x="1463479" y="2073503"/>
+              <a:off x="1464298" y="2073503"/>
               <a:ext cx="0" cy="3649639"/>
             </a:xfrm>
             <a:custGeom>
@@ -2486,7 +2486,7 @@
           </p:nvSpPr>
           <p:spPr>
             <a:xfrm>
-              <a:off x="3267849" y="2073503"/>
+              <a:off x="3268188" y="2073503"/>
               <a:ext cx="0" cy="3649639"/>
             </a:xfrm>
             <a:custGeom>
@@ -2529,7 +2529,7 @@
           </p:nvSpPr>
           <p:spPr>
             <a:xfrm>
-              <a:off x="5072218" y="2073503"/>
+              <a:off x="5072078" y="2073503"/>
               <a:ext cx="0" cy="3649639"/>
             </a:xfrm>
             <a:custGeom>
@@ -2572,7 +2572,7 @@
           </p:nvSpPr>
           <p:spPr>
             <a:xfrm>
-              <a:off x="6876587" y="2073503"/>
+              <a:off x="6875967" y="2073503"/>
               <a:ext cx="0" cy="3649639"/>
             </a:xfrm>
             <a:custGeom>
@@ -2830,7 +2830,7 @@
           </p:nvSpPr>
           <p:spPr>
             <a:xfrm>
-              <a:off x="2365664" y="2073503"/>
+              <a:off x="2366243" y="2073503"/>
               <a:ext cx="0" cy="3649639"/>
             </a:xfrm>
             <a:custGeom>
@@ -2873,7 +2873,7 @@
           </p:nvSpPr>
           <p:spPr>
             <a:xfrm>
-              <a:off x="4170033" y="2073503"/>
+              <a:off x="4170133" y="2073503"/>
               <a:ext cx="0" cy="3649639"/>
             </a:xfrm>
             <a:custGeom>
@@ -2916,7 +2916,7 @@
           </p:nvSpPr>
           <p:spPr>
             <a:xfrm>
-              <a:off x="5974402" y="2073503"/>
+              <a:off x="5974022" y="2073503"/>
               <a:ext cx="0" cy="3649639"/>
             </a:xfrm>
             <a:custGeom>
@@ -2959,7 +2959,7 @@
           </p:nvSpPr>
           <p:spPr>
             <a:xfrm>
-              <a:off x="7778772" y="2073503"/>
+              <a:off x="7777912" y="2073503"/>
               <a:ext cx="0" cy="3649639"/>
             </a:xfrm>
             <a:custGeom>
@@ -3003,12 +3003,12 @@
           <p:spPr>
             <a:xfrm>
               <a:off x="1172049" y="2073503"/>
-              <a:ext cx="3167273" cy="3483746"/>
+              <a:ext cx="3171926" cy="3483746"/>
             </a:xfrm>
             <a:custGeom>
               <a:avLst/>
               <a:pathLst>
-                <a:path w="3167273" h="3483746">
+                <a:path w="3171926" h="3483746">
                   <a:moveTo>
                     <a:pt x="0" y="3483746"/>
                   </a:moveTo>
@@ -3064,148 +3064,148 @@
                     <a:pt x="1217582" y="3483746"/>
                   </a:lnTo>
                   <a:lnTo>
-                    <a:pt x="1289205" y="3483745"/>
+                    <a:pt x="1289205" y="3483746"/>
                   </a:lnTo>
                   <a:lnTo>
                     <a:pt x="1360827" y="3483745"/>
                   </a:lnTo>
                   <a:lnTo>
-                    <a:pt x="1432450" y="3483743"/>
+                    <a:pt x="1432450" y="3483744"/>
                   </a:lnTo>
                   <a:lnTo>
                     <a:pt x="1504073" y="3483741"/>
                   </a:lnTo>
                   <a:lnTo>
-                    <a:pt x="1575695" y="3483737"/>
-                  </a:lnTo>
-                  <a:lnTo>
-                    <a:pt x="1647318" y="3483730"/>
-                  </a:lnTo>
-                  <a:lnTo>
-                    <a:pt x="1718940" y="3483717"/>
-                  </a:lnTo>
-                  <a:lnTo>
-                    <a:pt x="1790563" y="3483694"/>
-                  </a:lnTo>
-                  <a:lnTo>
-                    <a:pt x="1862185" y="3483654"/>
-                  </a:lnTo>
-                  <a:lnTo>
-                    <a:pt x="1933808" y="3483581"/>
-                  </a:lnTo>
-                  <a:lnTo>
-                    <a:pt x="2005430" y="3483452"/>
-                  </a:lnTo>
-                  <a:lnTo>
-                    <a:pt x="2077053" y="3483223"/>
-                  </a:lnTo>
-                  <a:lnTo>
-                    <a:pt x="2148675" y="3482816"/>
-                  </a:lnTo>
-                  <a:lnTo>
-                    <a:pt x="2220298" y="3482090"/>
-                  </a:lnTo>
-                  <a:lnTo>
-                    <a:pt x="2291920" y="3480799"/>
-                  </a:lnTo>
-                  <a:lnTo>
-                    <a:pt x="2363543" y="3478502"/>
-                  </a:lnTo>
-                  <a:lnTo>
-                    <a:pt x="2435165" y="3474414"/>
-                  </a:lnTo>
-                  <a:lnTo>
-                    <a:pt x="2506788" y="3467141"/>
-                  </a:lnTo>
-                  <a:lnTo>
-                    <a:pt x="2578410" y="3454197"/>
-                  </a:lnTo>
-                  <a:lnTo>
-                    <a:pt x="2650033" y="3431166"/>
-                  </a:lnTo>
-                  <a:lnTo>
-                    <a:pt x="2721655" y="3390182"/>
-                  </a:lnTo>
-                  <a:lnTo>
-                    <a:pt x="2793278" y="3317254"/>
-                  </a:lnTo>
-                  <a:lnTo>
-                    <a:pt x="2864901" y="3187484"/>
-                  </a:lnTo>
-                  <a:lnTo>
-                    <a:pt x="2936523" y="2956565"/>
-                  </a:lnTo>
-                  <a:lnTo>
-                    <a:pt x="3008146" y="2510956"/>
-                  </a:lnTo>
-                  <a:lnTo>
-                    <a:pt x="3079768" y="1431726"/>
-                  </a:lnTo>
-                  <a:lnTo>
-                    <a:pt x="3124812" y="0"/>
-                  </a:lnTo>
-                  <a:lnTo>
-                    <a:pt x="3167273" y="0"/>
-                  </a:lnTo>
-                  <a:lnTo>
-                    <a:pt x="3151391" y="513387"/>
-                  </a:lnTo>
-                  <a:lnTo>
-                    <a:pt x="3079768" y="1814479"/>
-                  </a:lnTo>
-                  <a:lnTo>
-                    <a:pt x="3008146" y="2545660"/>
-                  </a:lnTo>
-                  <a:lnTo>
-                    <a:pt x="2936523" y="3022581"/>
-                  </a:lnTo>
-                  <a:lnTo>
-                    <a:pt x="2864901" y="3265124"/>
-                  </a:lnTo>
-                  <a:lnTo>
-                    <a:pt x="2793278" y="3380105"/>
-                  </a:lnTo>
-                  <a:lnTo>
-                    <a:pt x="2721655" y="3434614"/>
-                  </a:lnTo>
-                  <a:lnTo>
-                    <a:pt x="2650033" y="3460454"/>
-                  </a:lnTo>
-                  <a:lnTo>
-                    <a:pt x="2578410" y="3472704"/>
-                  </a:lnTo>
-                  <a:lnTo>
-                    <a:pt x="2506788" y="3478512"/>
-                  </a:lnTo>
-                  <a:lnTo>
-                    <a:pt x="2435165" y="3481265"/>
-                  </a:lnTo>
-                  <a:lnTo>
-                    <a:pt x="2363543" y="3482570"/>
-                  </a:lnTo>
-                  <a:lnTo>
-                    <a:pt x="2291920" y="3483189"/>
-                  </a:lnTo>
-                  <a:lnTo>
-                    <a:pt x="2220298" y="3483482"/>
-                  </a:lnTo>
-                  <a:lnTo>
-                    <a:pt x="2148675" y="3483621"/>
-                  </a:lnTo>
-                  <a:lnTo>
-                    <a:pt x="2077053" y="3483687"/>
-                  </a:lnTo>
-                  <a:lnTo>
-                    <a:pt x="2005430" y="3483718"/>
-                  </a:lnTo>
-                  <a:lnTo>
-                    <a:pt x="1933808" y="3483733"/>
+                    <a:pt x="1575695" y="3483738"/>
+                  </a:lnTo>
+                  <a:lnTo>
+                    <a:pt x="1647318" y="3483731"/>
+                  </a:lnTo>
+                  <a:lnTo>
+                    <a:pt x="1718940" y="3483718"/>
+                  </a:lnTo>
+                  <a:lnTo>
+                    <a:pt x="1790563" y="3483696"/>
+                  </a:lnTo>
+                  <a:lnTo>
+                    <a:pt x="1862185" y="3483658"/>
+                  </a:lnTo>
+                  <a:lnTo>
+                    <a:pt x="1933808" y="3483588"/>
+                  </a:lnTo>
+                  <a:lnTo>
+                    <a:pt x="2005430" y="3483465"/>
+                  </a:lnTo>
+                  <a:lnTo>
+                    <a:pt x="2077053" y="3483245"/>
+                  </a:lnTo>
+                  <a:lnTo>
+                    <a:pt x="2148675" y="3482855"/>
+                  </a:lnTo>
+                  <a:lnTo>
+                    <a:pt x="2220298" y="3482160"/>
+                  </a:lnTo>
+                  <a:lnTo>
+                    <a:pt x="2291920" y="3480923"/>
+                  </a:lnTo>
+                  <a:lnTo>
+                    <a:pt x="2363543" y="3478722"/>
+                  </a:lnTo>
+                  <a:lnTo>
+                    <a:pt x="2435165" y="3474806"/>
+                  </a:lnTo>
+                  <a:lnTo>
+                    <a:pt x="2506788" y="3467836"/>
+                  </a:lnTo>
+                  <a:lnTo>
+                    <a:pt x="2578410" y="3455433"/>
+                  </a:lnTo>
+                  <a:lnTo>
+                    <a:pt x="2650033" y="3433362"/>
+                  </a:lnTo>
+                  <a:lnTo>
+                    <a:pt x="2721655" y="3394085"/>
+                  </a:lnTo>
+                  <a:lnTo>
+                    <a:pt x="2793278" y="3324191"/>
+                  </a:lnTo>
+                  <a:lnTo>
+                    <a:pt x="2864901" y="3199813"/>
+                  </a:lnTo>
+                  <a:lnTo>
+                    <a:pt x="2936523" y="2978477"/>
+                  </a:lnTo>
+                  <a:lnTo>
+                    <a:pt x="3008146" y="2562922"/>
+                  </a:lnTo>
+                  <a:lnTo>
+                    <a:pt x="3079768" y="1540989"/>
+                  </a:lnTo>
+                  <a:lnTo>
+                    <a:pt x="3130958" y="0"/>
+                  </a:lnTo>
+                  <a:lnTo>
+                    <a:pt x="3171926" y="0"/>
+                  </a:lnTo>
+                  <a:lnTo>
+                    <a:pt x="3151391" y="636392"/>
+                  </a:lnTo>
+                  <a:lnTo>
+                    <a:pt x="3079768" y="1883689"/>
+                  </a:lnTo>
+                  <a:lnTo>
+                    <a:pt x="3008146" y="2584602"/>
+                  </a:lnTo>
+                  <a:lnTo>
+                    <a:pt x="2936523" y="3047295"/>
+                  </a:lnTo>
+                  <a:lnTo>
+                    <a:pt x="2864901" y="3276878"/>
+                  </a:lnTo>
+                  <a:lnTo>
+                    <a:pt x="2793278" y="3385695"/>
+                  </a:lnTo>
+                  <a:lnTo>
+                    <a:pt x="2721655" y="3437272"/>
+                  </a:lnTo>
+                  <a:lnTo>
+                    <a:pt x="2650033" y="3461719"/>
+                  </a:lnTo>
+                  <a:lnTo>
+                    <a:pt x="2578410" y="3473306"/>
+                  </a:lnTo>
+                  <a:lnTo>
+                    <a:pt x="2506788" y="3478798"/>
+                  </a:lnTo>
+                  <a:lnTo>
+                    <a:pt x="2435165" y="3481401"/>
+                  </a:lnTo>
+                  <a:lnTo>
+                    <a:pt x="2363543" y="3482635"/>
+                  </a:lnTo>
+                  <a:lnTo>
+                    <a:pt x="2291920" y="3483219"/>
+                  </a:lnTo>
+                  <a:lnTo>
+                    <a:pt x="2220298" y="3483497"/>
+                  </a:lnTo>
+                  <a:lnTo>
+                    <a:pt x="2148675" y="3483628"/>
+                  </a:lnTo>
+                  <a:lnTo>
+                    <a:pt x="2077053" y="3483690"/>
+                  </a:lnTo>
+                  <a:lnTo>
+                    <a:pt x="2005430" y="3483720"/>
+                  </a:lnTo>
+                  <a:lnTo>
+                    <a:pt x="1933808" y="3483734"/>
                   </a:lnTo>
                   <a:lnTo>
                     <a:pt x="1862185" y="3483740"/>
                   </a:lnTo>
                   <a:lnTo>
-                    <a:pt x="1790563" y="3483743"/>
+                    <a:pt x="1790563" y="3483744"/>
                   </a:lnTo>
                   <a:lnTo>
                     <a:pt x="1718940" y="3483745"/>
@@ -3304,12 +3304,12 @@
           <p:spPr>
             <a:xfrm>
               <a:off x="1172049" y="2073503"/>
-              <a:ext cx="3124812" cy="3483746"/>
+              <a:ext cx="3130958" cy="3483746"/>
             </a:xfrm>
             <a:custGeom>
               <a:avLst/>
               <a:pathLst>
-                <a:path w="3124812" h="3483746">
+                <a:path w="3130958" h="3483746">
                   <a:moveTo>
                     <a:pt x="0" y="3483746"/>
                   </a:moveTo>
@@ -3365,85 +3365,85 @@
                     <a:pt x="1217582" y="3483746"/>
                   </a:lnTo>
                   <a:lnTo>
-                    <a:pt x="1289205" y="3483745"/>
+                    <a:pt x="1289205" y="3483746"/>
                   </a:lnTo>
                   <a:lnTo>
                     <a:pt x="1360827" y="3483745"/>
                   </a:lnTo>
                   <a:lnTo>
-                    <a:pt x="1432450" y="3483743"/>
+                    <a:pt x="1432450" y="3483744"/>
                   </a:lnTo>
                   <a:lnTo>
                     <a:pt x="1504073" y="3483741"/>
                   </a:lnTo>
                   <a:lnTo>
-                    <a:pt x="1575695" y="3483737"/>
-                  </a:lnTo>
-                  <a:lnTo>
-                    <a:pt x="1647318" y="3483730"/>
-                  </a:lnTo>
-                  <a:lnTo>
-                    <a:pt x="1718940" y="3483717"/>
-                  </a:lnTo>
-                  <a:lnTo>
-                    <a:pt x="1790563" y="3483694"/>
-                  </a:lnTo>
-                  <a:lnTo>
-                    <a:pt x="1862185" y="3483654"/>
-                  </a:lnTo>
-                  <a:lnTo>
-                    <a:pt x="1933808" y="3483581"/>
-                  </a:lnTo>
-                  <a:lnTo>
-                    <a:pt x="2005430" y="3483452"/>
-                  </a:lnTo>
-                  <a:lnTo>
-                    <a:pt x="2077053" y="3483223"/>
-                  </a:lnTo>
-                  <a:lnTo>
-                    <a:pt x="2148675" y="3482816"/>
-                  </a:lnTo>
-                  <a:lnTo>
-                    <a:pt x="2220298" y="3482090"/>
-                  </a:lnTo>
-                  <a:lnTo>
-                    <a:pt x="2291920" y="3480799"/>
-                  </a:lnTo>
-                  <a:lnTo>
-                    <a:pt x="2363543" y="3478502"/>
-                  </a:lnTo>
-                  <a:lnTo>
-                    <a:pt x="2435165" y="3474414"/>
-                  </a:lnTo>
-                  <a:lnTo>
-                    <a:pt x="2506788" y="3467141"/>
-                  </a:lnTo>
-                  <a:lnTo>
-                    <a:pt x="2578410" y="3454197"/>
-                  </a:lnTo>
-                  <a:lnTo>
-                    <a:pt x="2650033" y="3431166"/>
-                  </a:lnTo>
-                  <a:lnTo>
-                    <a:pt x="2721655" y="3390182"/>
-                  </a:lnTo>
-                  <a:lnTo>
-                    <a:pt x="2793278" y="3317254"/>
-                  </a:lnTo>
-                  <a:lnTo>
-                    <a:pt x="2864901" y="3187484"/>
-                  </a:lnTo>
-                  <a:lnTo>
-                    <a:pt x="2936523" y="2956565"/>
-                  </a:lnTo>
-                  <a:lnTo>
-                    <a:pt x="3008146" y="2510956"/>
-                  </a:lnTo>
-                  <a:lnTo>
-                    <a:pt x="3079768" y="1431726"/>
-                  </a:lnTo>
-                  <a:lnTo>
-                    <a:pt x="3124812" y="0"/>
+                    <a:pt x="1575695" y="3483738"/>
+                  </a:lnTo>
+                  <a:lnTo>
+                    <a:pt x="1647318" y="3483731"/>
+                  </a:lnTo>
+                  <a:lnTo>
+                    <a:pt x="1718940" y="3483718"/>
+                  </a:lnTo>
+                  <a:lnTo>
+                    <a:pt x="1790563" y="3483696"/>
+                  </a:lnTo>
+                  <a:lnTo>
+                    <a:pt x="1862185" y="3483658"/>
+                  </a:lnTo>
+                  <a:lnTo>
+                    <a:pt x="1933808" y="3483588"/>
+                  </a:lnTo>
+                  <a:lnTo>
+                    <a:pt x="2005430" y="3483465"/>
+                  </a:lnTo>
+                  <a:lnTo>
+                    <a:pt x="2077053" y="3483245"/>
+                  </a:lnTo>
+                  <a:lnTo>
+                    <a:pt x="2148675" y="3482855"/>
+                  </a:lnTo>
+                  <a:lnTo>
+                    <a:pt x="2220298" y="3482160"/>
+                  </a:lnTo>
+                  <a:lnTo>
+                    <a:pt x="2291920" y="3480923"/>
+                  </a:lnTo>
+                  <a:lnTo>
+                    <a:pt x="2363543" y="3478722"/>
+                  </a:lnTo>
+                  <a:lnTo>
+                    <a:pt x="2435165" y="3474806"/>
+                  </a:lnTo>
+                  <a:lnTo>
+                    <a:pt x="2506788" y="3467836"/>
+                  </a:lnTo>
+                  <a:lnTo>
+                    <a:pt x="2578410" y="3455433"/>
+                  </a:lnTo>
+                  <a:lnTo>
+                    <a:pt x="2650033" y="3433362"/>
+                  </a:lnTo>
+                  <a:lnTo>
+                    <a:pt x="2721655" y="3394085"/>
+                  </a:lnTo>
+                  <a:lnTo>
+                    <a:pt x="2793278" y="3324191"/>
+                  </a:lnTo>
+                  <a:lnTo>
+                    <a:pt x="2864901" y="3199813"/>
+                  </a:lnTo>
+                  <a:lnTo>
+                    <a:pt x="2936523" y="2978477"/>
+                  </a:lnTo>
+                  <a:lnTo>
+                    <a:pt x="3008146" y="2562922"/>
+                  </a:lnTo>
+                  <a:lnTo>
+                    <a:pt x="3079768" y="1540989"/>
+                  </a:lnTo>
+                  <a:lnTo>
+                    <a:pt x="3130958" y="0"/>
                   </a:lnTo>
                 </a:path>
               </a:pathLst>
@@ -3464,74 +3464,74 @@
           <p:spPr>
             <a:xfrm>
               <a:off x="1172049" y="2073503"/>
-              <a:ext cx="3167273" cy="3483746"/>
+              <a:ext cx="3171926" cy="3483746"/>
             </a:xfrm>
             <a:custGeom>
               <a:avLst/>
               <a:pathLst>
-                <a:path w="3167273" h="3483746">
+                <a:path w="3171926" h="3483746">
                   <a:moveTo>
-                    <a:pt x="3167273" y="0"/>
+                    <a:pt x="3171926" y="0"/>
                   </a:moveTo>
                   <a:lnTo>
-                    <a:pt x="3151391" y="513387"/>
-                  </a:lnTo>
-                  <a:lnTo>
-                    <a:pt x="3079768" y="1814479"/>
-                  </a:lnTo>
-                  <a:lnTo>
-                    <a:pt x="3008146" y="2545660"/>
-                  </a:lnTo>
-                  <a:lnTo>
-                    <a:pt x="2936523" y="3022581"/>
-                  </a:lnTo>
-                  <a:lnTo>
-                    <a:pt x="2864901" y="3265124"/>
-                  </a:lnTo>
-                  <a:lnTo>
-                    <a:pt x="2793278" y="3380105"/>
-                  </a:lnTo>
-                  <a:lnTo>
-                    <a:pt x="2721655" y="3434614"/>
-                  </a:lnTo>
-                  <a:lnTo>
-                    <a:pt x="2650033" y="3460454"/>
-                  </a:lnTo>
-                  <a:lnTo>
-                    <a:pt x="2578410" y="3472704"/>
-                  </a:lnTo>
-                  <a:lnTo>
-                    <a:pt x="2506788" y="3478512"/>
-                  </a:lnTo>
-                  <a:lnTo>
-                    <a:pt x="2435165" y="3481265"/>
-                  </a:lnTo>
-                  <a:lnTo>
-                    <a:pt x="2363543" y="3482570"/>
-                  </a:lnTo>
-                  <a:lnTo>
-                    <a:pt x="2291920" y="3483189"/>
-                  </a:lnTo>
-                  <a:lnTo>
-                    <a:pt x="2220298" y="3483482"/>
-                  </a:lnTo>
-                  <a:lnTo>
-                    <a:pt x="2148675" y="3483621"/>
-                  </a:lnTo>
-                  <a:lnTo>
-                    <a:pt x="2077053" y="3483687"/>
-                  </a:lnTo>
-                  <a:lnTo>
-                    <a:pt x="2005430" y="3483718"/>
-                  </a:lnTo>
-                  <a:lnTo>
-                    <a:pt x="1933808" y="3483733"/>
+                    <a:pt x="3151391" y="636392"/>
+                  </a:lnTo>
+                  <a:lnTo>
+                    <a:pt x="3079768" y="1883689"/>
+                  </a:lnTo>
+                  <a:lnTo>
+                    <a:pt x="3008146" y="2584602"/>
+                  </a:lnTo>
+                  <a:lnTo>
+                    <a:pt x="2936523" y="3047295"/>
+                  </a:lnTo>
+                  <a:lnTo>
+                    <a:pt x="2864901" y="3276878"/>
+                  </a:lnTo>
+                  <a:lnTo>
+                    <a:pt x="2793278" y="3385695"/>
+                  </a:lnTo>
+                  <a:lnTo>
+                    <a:pt x="2721655" y="3437272"/>
+                  </a:lnTo>
+                  <a:lnTo>
+                    <a:pt x="2650033" y="3461719"/>
+                  </a:lnTo>
+                  <a:lnTo>
+                    <a:pt x="2578410" y="3473306"/>
+                  </a:lnTo>
+                  <a:lnTo>
+                    <a:pt x="2506788" y="3478798"/>
+                  </a:lnTo>
+                  <a:lnTo>
+                    <a:pt x="2435165" y="3481401"/>
+                  </a:lnTo>
+                  <a:lnTo>
+                    <a:pt x="2363543" y="3482635"/>
+                  </a:lnTo>
+                  <a:lnTo>
+                    <a:pt x="2291920" y="3483219"/>
+                  </a:lnTo>
+                  <a:lnTo>
+                    <a:pt x="2220298" y="3483497"/>
+                  </a:lnTo>
+                  <a:lnTo>
+                    <a:pt x="2148675" y="3483628"/>
+                  </a:lnTo>
+                  <a:lnTo>
+                    <a:pt x="2077053" y="3483690"/>
+                  </a:lnTo>
+                  <a:lnTo>
+                    <a:pt x="2005430" y="3483720"/>
+                  </a:lnTo>
+                  <a:lnTo>
+                    <a:pt x="1933808" y="3483734"/>
                   </a:lnTo>
                   <a:lnTo>
                     <a:pt x="1862185" y="3483740"/>
                   </a:lnTo>
                   <a:lnTo>
-                    <a:pt x="1790563" y="3483743"/>
+                    <a:pt x="1790563" y="3483744"/>
                   </a:lnTo>
                   <a:lnTo>
                     <a:pt x="1718940" y="3483745"/>
@@ -3627,12 +3627,12 @@
           <p:spPr>
             <a:xfrm>
               <a:off x="1172049" y="2073503"/>
-              <a:ext cx="3147181" cy="3483746"/>
+              <a:ext cx="3152900" cy="3483746"/>
             </a:xfrm>
             <a:custGeom>
               <a:avLst/>
               <a:pathLst>
-                <a:path w="3147181" h="3483746">
+                <a:path w="3152900" h="3483746">
                   <a:moveTo>
                     <a:pt x="0" y="3483746"/>
                   </a:moveTo>
@@ -3709,64 +3709,67 @@
                     <a:pt x="1718940" y="3483740"/>
                   </a:lnTo>
                   <a:lnTo>
-                    <a:pt x="1790563" y="3483734"/>
-                  </a:lnTo>
-                  <a:lnTo>
-                    <a:pt x="1862185" y="3483722"/>
-                  </a:lnTo>
-                  <a:lnTo>
-                    <a:pt x="1933808" y="3483699"/>
-                  </a:lnTo>
-                  <a:lnTo>
-                    <a:pt x="2005430" y="3483655"/>
-                  </a:lnTo>
-                  <a:lnTo>
-                    <a:pt x="2077053" y="3483570"/>
-                  </a:lnTo>
-                  <a:lnTo>
-                    <a:pt x="2148675" y="3483405"/>
-                  </a:lnTo>
-                  <a:lnTo>
-                    <a:pt x="2220298" y="3483085"/>
-                  </a:lnTo>
-                  <a:lnTo>
-                    <a:pt x="2291920" y="3482464"/>
-                  </a:lnTo>
-                  <a:lnTo>
-                    <a:pt x="2363543" y="3481263"/>
-                  </a:lnTo>
-                  <a:lnTo>
-                    <a:pt x="2435165" y="3478934"/>
-                  </a:lnTo>
-                  <a:lnTo>
-                    <a:pt x="2506788" y="3474423"/>
-                  </a:lnTo>
-                  <a:lnTo>
-                    <a:pt x="2578410" y="3465683"/>
-                  </a:lnTo>
-                  <a:lnTo>
-                    <a:pt x="2650033" y="3448750"/>
-                  </a:lnTo>
-                  <a:lnTo>
-                    <a:pt x="2721655" y="3415945"/>
-                  </a:lnTo>
-                  <a:lnTo>
-                    <a:pt x="2793278" y="3352386"/>
-                  </a:lnTo>
-                  <a:lnTo>
-                    <a:pt x="2864901" y="3229248"/>
-                  </a:lnTo>
-                  <a:lnTo>
-                    <a:pt x="2936523" y="2990677"/>
-                  </a:lnTo>
-                  <a:lnTo>
-                    <a:pt x="3008146" y="2528466"/>
-                  </a:lnTo>
-                  <a:lnTo>
-                    <a:pt x="3079768" y="1632971"/>
-                  </a:lnTo>
-                  <a:lnTo>
-                    <a:pt x="3147181" y="0"/>
+                    <a:pt x="1790563" y="3483735"/>
+                  </a:lnTo>
+                  <a:lnTo>
+                    <a:pt x="1862185" y="3483723"/>
+                  </a:lnTo>
+                  <a:lnTo>
+                    <a:pt x="1933808" y="3483702"/>
+                  </a:lnTo>
+                  <a:lnTo>
+                    <a:pt x="2005430" y="3483660"/>
+                  </a:lnTo>
+                  <a:lnTo>
+                    <a:pt x="2077053" y="3483579"/>
+                  </a:lnTo>
+                  <a:lnTo>
+                    <a:pt x="2148675" y="3483422"/>
+                  </a:lnTo>
+                  <a:lnTo>
+                    <a:pt x="2220298" y="3483117"/>
+                  </a:lnTo>
+                  <a:lnTo>
+                    <a:pt x="2291920" y="3482527"/>
+                  </a:lnTo>
+                  <a:lnTo>
+                    <a:pt x="2363543" y="3481383"/>
+                  </a:lnTo>
+                  <a:lnTo>
+                    <a:pt x="2435165" y="3479167"/>
+                  </a:lnTo>
+                  <a:lnTo>
+                    <a:pt x="2506788" y="3474873"/>
+                  </a:lnTo>
+                  <a:lnTo>
+                    <a:pt x="2578410" y="3466553"/>
+                  </a:lnTo>
+                  <a:lnTo>
+                    <a:pt x="2650033" y="3450432"/>
+                  </a:lnTo>
+                  <a:lnTo>
+                    <a:pt x="2721655" y="3419195"/>
+                  </a:lnTo>
+                  <a:lnTo>
+                    <a:pt x="2793278" y="3358668"/>
+                  </a:lnTo>
+                  <a:lnTo>
+                    <a:pt x="2864901" y="3241389"/>
+                  </a:lnTo>
+                  <a:lnTo>
+                    <a:pt x="2936523" y="3014145"/>
+                  </a:lnTo>
+                  <a:lnTo>
+                    <a:pt x="3008146" y="2573826"/>
+                  </a:lnTo>
+                  <a:lnTo>
+                    <a:pt x="3079768" y="1720646"/>
+                  </a:lnTo>
+                  <a:lnTo>
+                    <a:pt x="3151391" y="67487"/>
+                  </a:lnTo>
+                  <a:lnTo>
+                    <a:pt x="3152900" y="0"/>
                   </a:lnTo>
                 </a:path>
               </a:pathLst>
@@ -3838,7 +3841,7 @@
           </p:nvSpPr>
           <p:spPr>
             <a:xfrm>
-              <a:off x="4164901" y="2073503"/>
+              <a:off x="4170171" y="2073503"/>
               <a:ext cx="0" cy="3649639"/>
             </a:xfrm>
             <a:custGeom>
@@ -4111,7 +4114,7 @@
           </p:nvSpPr>
           <p:spPr>
             <a:xfrm>
-              <a:off x="2284877" y="5785772"/>
+              <a:off x="2285456" y="5785772"/>
               <a:ext cx="161574" cy="80101"/>
             </a:xfrm>
             <a:prstGeom prst="rect">
@@ -4157,7 +4160,7 @@
           </p:nvSpPr>
           <p:spPr>
             <a:xfrm>
-              <a:off x="4138944" y="5785772"/>
+              <a:off x="4139043" y="5785772"/>
               <a:ext cx="62179" cy="80101"/>
             </a:xfrm>
             <a:prstGeom prst="rect">
@@ -4203,7 +4206,7 @@
           </p:nvSpPr>
           <p:spPr>
             <a:xfrm>
-              <a:off x="5912223" y="5785772"/>
+              <a:off x="5911843" y="5785772"/>
               <a:ext cx="124358" cy="80101"/>
             </a:xfrm>
             <a:prstGeom prst="rect">
@@ -4249,7 +4252,7 @@
           </p:nvSpPr>
           <p:spPr>
             <a:xfrm>
-              <a:off x="7716592" y="5785772"/>
+              <a:off x="7715733" y="5785772"/>
               <a:ext cx="124358" cy="80101"/>
             </a:xfrm>
             <a:prstGeom prst="rect">
@@ -4420,7 +4423,7 @@
                   <a:latin typeface="Helvetica"/>
                   <a:cs typeface="Helvetica"/>
                 </a:rPr>
-                <a:t>subHR per 10 % decline: 0.00 (0.00-0.00), p = &lt;0.001  |  per IQR decline (Δ = 27.4 %): 0.00 (0.00-0.00)  |  IQR: [-12.6, 14.8] %</a:t>
+                <a:t>subHR per 10 % decline: 0.00 (0.00-0.00), p = &lt;0.001  |  per IQR decline (Δ = 27.2 %): 0.00 (0.00-0.00)  |  IQR: [-12.3, 14.9] %</a:t>
               </a:r>
             </a:p>
           </p:txBody>
